--- a/docs/TripPlanner_presentation.pptx
+++ b/docs/TripPlanner_presentation.pptx
@@ -3318,7 +3318,7 @@
                 </a:solidFill>
                 <a:latin typeface="Calibri"/>
               </a:rPr>
-              <a:t>Автор: Роман Тодоров</a:t>
+              <a:t>Автор: Роман Тодор</a:t>
             </a:r>
           </a:p>
         </p:txBody>
@@ -6392,7 +6392,7 @@
                 </a:solidFill>
                 <a:latin typeface="Calibri"/>
               </a:rPr>
-              <a:t>Роман Тодоров · Яндекс Лицей · 2026</a:t>
+              <a:t>Роман Тодор · Яндекс Лицей · 2026</a:t>
             </a:r>
           </a:p>
         </p:txBody>
